--- a/Containers for Local Development.pptx
+++ b/Containers for Local Development.pptx
@@ -32,9 +32,7 @@
     <p:embeddedFont>
       <p:font typeface="EB Garamond Medium" panose="00000600000000000000" pitchFamily="2" charset="0"/>
       <p:regular r:id="rId20"/>
-      <p:bold r:id="rId21"/>
-      <p:italic r:id="rId22"/>
-      <p:boldItalic r:id="rId23"/>
+      <p:italic r:id="rId21"/>
     </p:embeddedFont>
   </p:embeddedFontLst>
   <p:defaultTextStyle>
@@ -3871,7 +3869,7 @@
         <p:fade/>
       </p:transition>
     </mc:Choice>
-    <mc:Fallback xmlns="" xmlns:mv="urn:schemas-microsoft-com:mac:vml" xmlns:c="http://schemas.openxmlformats.org/drawingml/2006/chart" xmlns:dgm="http://schemas.openxmlformats.org/drawingml/2006/diagram" xmlns:o="urn:schemas-microsoft-com:office:office" xmlns:v="urn:schemas-microsoft-com:vml" xmlns:pvml="urn:schemas-microsoft-com:office:powerpoint" xmlns:com="http://schemas.openxmlformats.org/drawingml/2006/compatibility" xmlns:p15="http://schemas.microsoft.com/office/powerpoint/2012/main" xmlns:ahyp="http://schemas.microsoft.com/office/drawing/2018/hyperlinkcolor">
+    <mc:Fallback xmlns:ahyp="http://schemas.microsoft.com/office/drawing/2018/hyperlinkcolor" xmlns:p15="http://schemas.microsoft.com/office/powerpoint/2012/main" xmlns:com="http://schemas.openxmlformats.org/drawingml/2006/compatibility" xmlns:pvml="urn:schemas-microsoft-com:office:powerpoint" xmlns:v="urn:schemas-microsoft-com:vml" xmlns:o="urn:schemas-microsoft-com:office:office" xmlns:dgm="http://schemas.openxmlformats.org/drawingml/2006/diagram" xmlns:c="http://schemas.openxmlformats.org/drawingml/2006/chart" xmlns:mv="urn:schemas-microsoft-com:mac:vml" xmlns="">
       <p:transition spd="slow">
         <p:fade/>
       </p:transition>
@@ -4361,7 +4359,7 @@
         <p:fade/>
       </p:transition>
     </mc:Choice>
-    <mc:Fallback xmlns="" xmlns:mv="urn:schemas-microsoft-com:mac:vml" xmlns:c="http://schemas.openxmlformats.org/drawingml/2006/chart" xmlns:dgm="http://schemas.openxmlformats.org/drawingml/2006/diagram" xmlns:o="urn:schemas-microsoft-com:office:office" xmlns:v="urn:schemas-microsoft-com:vml" xmlns:pvml="urn:schemas-microsoft-com:office:powerpoint" xmlns:com="http://schemas.openxmlformats.org/drawingml/2006/compatibility" xmlns:p15="http://schemas.microsoft.com/office/powerpoint/2012/main" xmlns:ahyp="http://schemas.microsoft.com/office/drawing/2018/hyperlinkcolor">
+    <mc:Fallback xmlns:ahyp="http://schemas.microsoft.com/office/drawing/2018/hyperlinkcolor" xmlns:p15="http://schemas.microsoft.com/office/powerpoint/2012/main" xmlns:com="http://schemas.openxmlformats.org/drawingml/2006/compatibility" xmlns:pvml="urn:schemas-microsoft-com:office:powerpoint" xmlns:v="urn:schemas-microsoft-com:vml" xmlns:o="urn:schemas-microsoft-com:office:office" xmlns:dgm="http://schemas.openxmlformats.org/drawingml/2006/diagram" xmlns:c="http://schemas.openxmlformats.org/drawingml/2006/chart" xmlns:mv="urn:schemas-microsoft-com:mac:vml" xmlns="">
       <p:transition spd="slow">
         <p:fade/>
       </p:transition>
@@ -4876,7 +4874,7 @@
         <p:fade/>
       </p:transition>
     </mc:Choice>
-    <mc:Fallback xmlns="" xmlns:mv="urn:schemas-microsoft-com:mac:vml" xmlns:c="http://schemas.openxmlformats.org/drawingml/2006/chart" xmlns:dgm="http://schemas.openxmlformats.org/drawingml/2006/diagram" xmlns:o="urn:schemas-microsoft-com:office:office" xmlns:v="urn:schemas-microsoft-com:vml" xmlns:pvml="urn:schemas-microsoft-com:office:powerpoint" xmlns:com="http://schemas.openxmlformats.org/drawingml/2006/compatibility" xmlns:p15="http://schemas.microsoft.com/office/powerpoint/2012/main" xmlns:ahyp="http://schemas.microsoft.com/office/drawing/2018/hyperlinkcolor">
+    <mc:Fallback xmlns:ahyp="http://schemas.microsoft.com/office/drawing/2018/hyperlinkcolor" xmlns:p15="http://schemas.microsoft.com/office/powerpoint/2012/main" xmlns:com="http://schemas.openxmlformats.org/drawingml/2006/compatibility" xmlns:pvml="urn:schemas-microsoft-com:office:powerpoint" xmlns:v="urn:schemas-microsoft-com:vml" xmlns:o="urn:schemas-microsoft-com:office:office" xmlns:dgm="http://schemas.openxmlformats.org/drawingml/2006/diagram" xmlns:c="http://schemas.openxmlformats.org/drawingml/2006/chart" xmlns:mv="urn:schemas-microsoft-com:mac:vml" xmlns="">
       <p:transition spd="slow">
         <p:fade/>
       </p:transition>
@@ -5513,7 +5511,7 @@
         <p:fade/>
       </p:transition>
     </mc:Choice>
-    <mc:Fallback xmlns="" xmlns:mv="urn:schemas-microsoft-com:mac:vml" xmlns:c="http://schemas.openxmlformats.org/drawingml/2006/chart" xmlns:dgm="http://schemas.openxmlformats.org/drawingml/2006/diagram" xmlns:o="urn:schemas-microsoft-com:office:office" xmlns:v="urn:schemas-microsoft-com:vml" xmlns:pvml="urn:schemas-microsoft-com:office:powerpoint" xmlns:com="http://schemas.openxmlformats.org/drawingml/2006/compatibility" xmlns:p15="http://schemas.microsoft.com/office/powerpoint/2012/main" xmlns:ahyp="http://schemas.microsoft.com/office/drawing/2018/hyperlinkcolor">
+    <mc:Fallback xmlns:ahyp="http://schemas.microsoft.com/office/drawing/2018/hyperlinkcolor" xmlns:p15="http://schemas.microsoft.com/office/powerpoint/2012/main" xmlns:com="http://schemas.openxmlformats.org/drawingml/2006/compatibility" xmlns:pvml="urn:schemas-microsoft-com:office:powerpoint" xmlns:v="urn:schemas-microsoft-com:vml" xmlns:o="urn:schemas-microsoft-com:office:office" xmlns:dgm="http://schemas.openxmlformats.org/drawingml/2006/diagram" xmlns:c="http://schemas.openxmlformats.org/drawingml/2006/chart" xmlns:mv="urn:schemas-microsoft-com:mac:vml" xmlns="">
       <p:transition spd="slow">
         <p:fade/>
       </p:transition>
@@ -6378,7 +6376,7 @@
         <p:fade/>
       </p:transition>
     </mc:Choice>
-    <mc:Fallback xmlns="" xmlns:mv="urn:schemas-microsoft-com:mac:vml" xmlns:c="http://schemas.openxmlformats.org/drawingml/2006/chart" xmlns:dgm="http://schemas.openxmlformats.org/drawingml/2006/diagram" xmlns:o="urn:schemas-microsoft-com:office:office" xmlns:v="urn:schemas-microsoft-com:vml" xmlns:pvml="urn:schemas-microsoft-com:office:powerpoint" xmlns:com="http://schemas.openxmlformats.org/drawingml/2006/compatibility" xmlns:p15="http://schemas.microsoft.com/office/powerpoint/2012/main" xmlns:ahyp="http://schemas.microsoft.com/office/drawing/2018/hyperlinkcolor">
+    <mc:Fallback xmlns:ahyp="http://schemas.microsoft.com/office/drawing/2018/hyperlinkcolor" xmlns:p15="http://schemas.microsoft.com/office/powerpoint/2012/main" xmlns:com="http://schemas.openxmlformats.org/drawingml/2006/compatibility" xmlns:pvml="urn:schemas-microsoft-com:office:powerpoint" xmlns:v="urn:schemas-microsoft-com:vml" xmlns:o="urn:schemas-microsoft-com:office:office" xmlns:dgm="http://schemas.openxmlformats.org/drawingml/2006/diagram" xmlns:c="http://schemas.openxmlformats.org/drawingml/2006/chart" xmlns:mv="urn:schemas-microsoft-com:mac:vml" xmlns="">
       <p:transition spd="slow">
         <p:fade/>
       </p:transition>
@@ -6634,7 +6632,7 @@
         <p:fade/>
       </p:transition>
     </mc:Choice>
-    <mc:Fallback xmlns="" xmlns:mv="urn:schemas-microsoft-com:mac:vml" xmlns:c="http://schemas.openxmlformats.org/drawingml/2006/chart" xmlns:dgm="http://schemas.openxmlformats.org/drawingml/2006/diagram" xmlns:o="urn:schemas-microsoft-com:office:office" xmlns:v="urn:schemas-microsoft-com:vml" xmlns:pvml="urn:schemas-microsoft-com:office:powerpoint" xmlns:com="http://schemas.openxmlformats.org/drawingml/2006/compatibility" xmlns:p15="http://schemas.microsoft.com/office/powerpoint/2012/main" xmlns:ahyp="http://schemas.microsoft.com/office/drawing/2018/hyperlinkcolor">
+    <mc:Fallback xmlns:ahyp="http://schemas.microsoft.com/office/drawing/2018/hyperlinkcolor" xmlns:p15="http://schemas.microsoft.com/office/powerpoint/2012/main" xmlns:com="http://schemas.openxmlformats.org/drawingml/2006/compatibility" xmlns:pvml="urn:schemas-microsoft-com:office:powerpoint" xmlns:v="urn:schemas-microsoft-com:vml" xmlns:o="urn:schemas-microsoft-com:office:office" xmlns:dgm="http://schemas.openxmlformats.org/drawingml/2006/diagram" xmlns:c="http://schemas.openxmlformats.org/drawingml/2006/chart" xmlns:mv="urn:schemas-microsoft-com:mac:vml" xmlns="">
       <p:transition spd="slow">
         <p:fade/>
       </p:transition>
@@ -6879,7 +6877,7 @@
         <p:fade/>
       </p:transition>
     </mc:Choice>
-    <mc:Fallback xmlns="" xmlns:mv="urn:schemas-microsoft-com:mac:vml" xmlns:c="http://schemas.openxmlformats.org/drawingml/2006/chart" xmlns:dgm="http://schemas.openxmlformats.org/drawingml/2006/diagram" xmlns:o="urn:schemas-microsoft-com:office:office" xmlns:v="urn:schemas-microsoft-com:vml" xmlns:pvml="urn:schemas-microsoft-com:office:powerpoint" xmlns:com="http://schemas.openxmlformats.org/drawingml/2006/compatibility" xmlns:p15="http://schemas.microsoft.com/office/powerpoint/2012/main" xmlns:ahyp="http://schemas.microsoft.com/office/drawing/2018/hyperlinkcolor">
+    <mc:Fallback xmlns:ahyp="http://schemas.microsoft.com/office/drawing/2018/hyperlinkcolor" xmlns:p15="http://schemas.microsoft.com/office/powerpoint/2012/main" xmlns:com="http://schemas.openxmlformats.org/drawingml/2006/compatibility" xmlns:pvml="urn:schemas-microsoft-com:office:powerpoint" xmlns:v="urn:schemas-microsoft-com:vml" xmlns:o="urn:schemas-microsoft-com:office:office" xmlns:dgm="http://schemas.openxmlformats.org/drawingml/2006/diagram" xmlns:c="http://schemas.openxmlformats.org/drawingml/2006/chart" xmlns:mv="urn:schemas-microsoft-com:mac:vml" xmlns="">
       <p:transition spd="slow">
         <p:fade/>
       </p:transition>
@@ -11681,7 +11679,7 @@
         <p:fade/>
       </p:transition>
     </mc:Choice>
-    <mc:Fallback xmlns="" xmlns:mv="urn:schemas-microsoft-com:mac:vml" xmlns:c="http://schemas.openxmlformats.org/drawingml/2006/chart" xmlns:dgm="http://schemas.openxmlformats.org/drawingml/2006/diagram" xmlns:o="urn:schemas-microsoft-com:office:office" xmlns:v="urn:schemas-microsoft-com:vml" xmlns:pvml="urn:schemas-microsoft-com:office:powerpoint" xmlns:com="http://schemas.openxmlformats.org/drawingml/2006/compatibility" xmlns:p15="http://schemas.microsoft.com/office/powerpoint/2012/main" xmlns:ahyp="http://schemas.microsoft.com/office/drawing/2018/hyperlinkcolor">
+    <mc:Fallback xmlns:ahyp="http://schemas.microsoft.com/office/drawing/2018/hyperlinkcolor" xmlns:p15="http://schemas.microsoft.com/office/powerpoint/2012/main" xmlns:com="http://schemas.openxmlformats.org/drawingml/2006/compatibility" xmlns:pvml="urn:schemas-microsoft-com:office:powerpoint" xmlns:v="urn:schemas-microsoft-com:vml" xmlns:o="urn:schemas-microsoft-com:office:office" xmlns:dgm="http://schemas.openxmlformats.org/drawingml/2006/diagram" xmlns:c="http://schemas.openxmlformats.org/drawingml/2006/chart" xmlns:mv="urn:schemas-microsoft-com:mac:vml" xmlns="">
       <p:transition spd="slow">
         <p:fade/>
       </p:transition>
@@ -12553,7 +12551,7 @@
         <p:fade/>
       </p:transition>
     </mc:Choice>
-    <mc:Fallback xmlns="" xmlns:mv="urn:schemas-microsoft-com:mac:vml" xmlns:c="http://schemas.openxmlformats.org/drawingml/2006/chart" xmlns:dgm="http://schemas.openxmlformats.org/drawingml/2006/diagram" xmlns:o="urn:schemas-microsoft-com:office:office" xmlns:v="urn:schemas-microsoft-com:vml" xmlns:pvml="urn:schemas-microsoft-com:office:powerpoint" xmlns:com="http://schemas.openxmlformats.org/drawingml/2006/compatibility" xmlns:p15="http://schemas.microsoft.com/office/powerpoint/2012/main" xmlns:ahyp="http://schemas.microsoft.com/office/drawing/2018/hyperlinkcolor">
+    <mc:Fallback xmlns:ahyp="http://schemas.microsoft.com/office/drawing/2018/hyperlinkcolor" xmlns:p15="http://schemas.microsoft.com/office/powerpoint/2012/main" xmlns:com="http://schemas.openxmlformats.org/drawingml/2006/compatibility" xmlns:pvml="urn:schemas-microsoft-com:office:powerpoint" xmlns:v="urn:schemas-microsoft-com:vml" xmlns:o="urn:schemas-microsoft-com:office:office" xmlns:dgm="http://schemas.openxmlformats.org/drawingml/2006/diagram" xmlns:c="http://schemas.openxmlformats.org/drawingml/2006/chart" xmlns:mv="urn:schemas-microsoft-com:mac:vml" xmlns="">
       <p:transition spd="slow">
         <p:fade/>
       </p:transition>
@@ -12891,7 +12889,7 @@
         <p:fade/>
       </p:transition>
     </mc:Choice>
-    <mc:Fallback xmlns="" xmlns:mv="urn:schemas-microsoft-com:mac:vml" xmlns:c="http://schemas.openxmlformats.org/drawingml/2006/chart" xmlns:dgm="http://schemas.openxmlformats.org/drawingml/2006/diagram" xmlns:o="urn:schemas-microsoft-com:office:office" xmlns:v="urn:schemas-microsoft-com:vml" xmlns:pvml="urn:schemas-microsoft-com:office:powerpoint" xmlns:com="http://schemas.openxmlformats.org/drawingml/2006/compatibility" xmlns:p15="http://schemas.microsoft.com/office/powerpoint/2012/main" xmlns:ahyp="http://schemas.microsoft.com/office/drawing/2018/hyperlinkcolor">
+    <mc:Fallback xmlns:ahyp="http://schemas.microsoft.com/office/drawing/2018/hyperlinkcolor" xmlns:p15="http://schemas.microsoft.com/office/powerpoint/2012/main" xmlns:com="http://schemas.openxmlformats.org/drawingml/2006/compatibility" xmlns:pvml="urn:schemas-microsoft-com:office:powerpoint" xmlns:v="urn:schemas-microsoft-com:vml" xmlns:o="urn:schemas-microsoft-com:office:office" xmlns:dgm="http://schemas.openxmlformats.org/drawingml/2006/diagram" xmlns:c="http://schemas.openxmlformats.org/drawingml/2006/chart" xmlns:mv="urn:schemas-microsoft-com:mac:vml" xmlns="">
       <p:transition spd="slow">
         <p:fade/>
       </p:transition>
@@ -13032,7 +13030,7 @@
         <p:fade/>
       </p:transition>
     </mc:Choice>
-    <mc:Fallback xmlns="" xmlns:mv="urn:schemas-microsoft-com:mac:vml" xmlns:c="http://schemas.openxmlformats.org/drawingml/2006/chart" xmlns:dgm="http://schemas.openxmlformats.org/drawingml/2006/diagram" xmlns:o="urn:schemas-microsoft-com:office:office" xmlns:v="urn:schemas-microsoft-com:vml" xmlns:pvml="urn:schemas-microsoft-com:office:powerpoint" xmlns:com="http://schemas.openxmlformats.org/drawingml/2006/compatibility" xmlns:p15="http://schemas.microsoft.com/office/powerpoint/2012/main" xmlns:ahyp="http://schemas.microsoft.com/office/drawing/2018/hyperlinkcolor">
+    <mc:Fallback xmlns:ahyp="http://schemas.microsoft.com/office/drawing/2018/hyperlinkcolor" xmlns:p15="http://schemas.microsoft.com/office/powerpoint/2012/main" xmlns:com="http://schemas.openxmlformats.org/drawingml/2006/compatibility" xmlns:pvml="urn:schemas-microsoft-com:office:powerpoint" xmlns:v="urn:schemas-microsoft-com:vml" xmlns:o="urn:schemas-microsoft-com:office:office" xmlns:dgm="http://schemas.openxmlformats.org/drawingml/2006/diagram" xmlns:c="http://schemas.openxmlformats.org/drawingml/2006/chart" xmlns:mv="urn:schemas-microsoft-com:mac:vml" xmlns="">
       <p:transition spd="slow">
         <p:fade/>
       </p:transition>
@@ -13192,7 +13190,7 @@
         <p:fade/>
       </p:transition>
     </mc:Choice>
-    <mc:Fallback xmlns="" xmlns:mv="urn:schemas-microsoft-com:mac:vml" xmlns:c="http://schemas.openxmlformats.org/drawingml/2006/chart" xmlns:dgm="http://schemas.openxmlformats.org/drawingml/2006/diagram" xmlns:o="urn:schemas-microsoft-com:office:office" xmlns:v="urn:schemas-microsoft-com:vml" xmlns:pvml="urn:schemas-microsoft-com:office:powerpoint" xmlns:com="http://schemas.openxmlformats.org/drawingml/2006/compatibility" xmlns:p15="http://schemas.microsoft.com/office/powerpoint/2012/main" xmlns:ahyp="http://schemas.microsoft.com/office/drawing/2018/hyperlinkcolor">
+    <mc:Fallback xmlns:ahyp="http://schemas.microsoft.com/office/drawing/2018/hyperlinkcolor" xmlns:p15="http://schemas.microsoft.com/office/powerpoint/2012/main" xmlns:com="http://schemas.openxmlformats.org/drawingml/2006/compatibility" xmlns:pvml="urn:schemas-microsoft-com:office:powerpoint" xmlns:v="urn:schemas-microsoft-com:vml" xmlns:o="urn:schemas-microsoft-com:office:office" xmlns:dgm="http://schemas.openxmlformats.org/drawingml/2006/diagram" xmlns:c="http://schemas.openxmlformats.org/drawingml/2006/chart" xmlns:mv="urn:schemas-microsoft-com:mac:vml" xmlns="">
       <p:transition spd="slow">
         <p:fade/>
       </p:transition>
@@ -13479,7 +13477,7 @@
         <p:fade/>
       </p:transition>
     </mc:Choice>
-    <mc:Fallback xmlns="" xmlns:mv="urn:schemas-microsoft-com:mac:vml" xmlns:c="http://schemas.openxmlformats.org/drawingml/2006/chart" xmlns:dgm="http://schemas.openxmlformats.org/drawingml/2006/diagram" xmlns:o="urn:schemas-microsoft-com:office:office" xmlns:v="urn:schemas-microsoft-com:vml" xmlns:pvml="urn:schemas-microsoft-com:office:powerpoint" xmlns:com="http://schemas.openxmlformats.org/drawingml/2006/compatibility" xmlns:p15="http://schemas.microsoft.com/office/powerpoint/2012/main" xmlns:ahyp="http://schemas.microsoft.com/office/drawing/2018/hyperlinkcolor">
+    <mc:Fallback xmlns:ahyp="http://schemas.microsoft.com/office/drawing/2018/hyperlinkcolor" xmlns:p15="http://schemas.microsoft.com/office/powerpoint/2012/main" xmlns:com="http://schemas.openxmlformats.org/drawingml/2006/compatibility" xmlns:pvml="urn:schemas-microsoft-com:office:powerpoint" xmlns:v="urn:schemas-microsoft-com:vml" xmlns:o="urn:schemas-microsoft-com:office:office" xmlns:dgm="http://schemas.openxmlformats.org/drawingml/2006/diagram" xmlns:c="http://schemas.openxmlformats.org/drawingml/2006/chart" xmlns:mv="urn:schemas-microsoft-com:mac:vml" xmlns="">
       <p:transition spd="slow">
         <p:fade/>
       </p:transition>
@@ -13785,7 +13783,7 @@
         <p:fade/>
       </p:transition>
     </mc:Choice>
-    <mc:Fallback xmlns="" xmlns:mv="urn:schemas-microsoft-com:mac:vml" xmlns:c="http://schemas.openxmlformats.org/drawingml/2006/chart" xmlns:dgm="http://schemas.openxmlformats.org/drawingml/2006/diagram" xmlns:o="urn:schemas-microsoft-com:office:office" xmlns:v="urn:schemas-microsoft-com:vml" xmlns:pvml="urn:schemas-microsoft-com:office:powerpoint" xmlns:com="http://schemas.openxmlformats.org/drawingml/2006/compatibility" xmlns:p15="http://schemas.microsoft.com/office/powerpoint/2012/main" xmlns:ahyp="http://schemas.microsoft.com/office/drawing/2018/hyperlinkcolor">
+    <mc:Fallback xmlns:ahyp="http://schemas.microsoft.com/office/drawing/2018/hyperlinkcolor" xmlns:p15="http://schemas.microsoft.com/office/powerpoint/2012/main" xmlns:com="http://schemas.openxmlformats.org/drawingml/2006/compatibility" xmlns:pvml="urn:schemas-microsoft-com:office:powerpoint" xmlns:v="urn:schemas-microsoft-com:vml" xmlns:o="urn:schemas-microsoft-com:office:office" xmlns:dgm="http://schemas.openxmlformats.org/drawingml/2006/diagram" xmlns:c="http://schemas.openxmlformats.org/drawingml/2006/chart" xmlns:mv="urn:schemas-microsoft-com:mac:vml" xmlns="">
       <p:transition spd="slow">
         <p:fade/>
       </p:transition>
@@ -14116,7 +14114,7 @@
         <p:fade/>
       </p:transition>
     </mc:Choice>
-    <mc:Fallback xmlns="" xmlns:mv="urn:schemas-microsoft-com:mac:vml" xmlns:c="http://schemas.openxmlformats.org/drawingml/2006/chart" xmlns:dgm="http://schemas.openxmlformats.org/drawingml/2006/diagram" xmlns:o="urn:schemas-microsoft-com:office:office" xmlns:v="urn:schemas-microsoft-com:vml" xmlns:pvml="urn:schemas-microsoft-com:office:powerpoint" xmlns:com="http://schemas.openxmlformats.org/drawingml/2006/compatibility" xmlns:p15="http://schemas.microsoft.com/office/powerpoint/2012/main" xmlns:ahyp="http://schemas.microsoft.com/office/drawing/2018/hyperlinkcolor">
+    <mc:Fallback xmlns:ahyp="http://schemas.microsoft.com/office/drawing/2018/hyperlinkcolor" xmlns:p15="http://schemas.microsoft.com/office/powerpoint/2012/main" xmlns:com="http://schemas.openxmlformats.org/drawingml/2006/compatibility" xmlns:pvml="urn:schemas-microsoft-com:office:powerpoint" xmlns:v="urn:schemas-microsoft-com:vml" xmlns:o="urn:schemas-microsoft-com:office:office" xmlns:dgm="http://schemas.openxmlformats.org/drawingml/2006/diagram" xmlns:c="http://schemas.openxmlformats.org/drawingml/2006/chart" xmlns:mv="urn:schemas-microsoft-com:mac:vml" xmlns="">
       <p:transition spd="slow">
         <p:fade/>
       </p:transition>
@@ -14207,7 +14205,7 @@
         <p:fade/>
       </p:transition>
     </mc:Choice>
-    <mc:Fallback xmlns="" xmlns:mv="urn:schemas-microsoft-com:mac:vml" xmlns:c="http://schemas.openxmlformats.org/drawingml/2006/chart" xmlns:dgm="http://schemas.openxmlformats.org/drawingml/2006/diagram" xmlns:o="urn:schemas-microsoft-com:office:office" xmlns:v="urn:schemas-microsoft-com:vml" xmlns:pvml="urn:schemas-microsoft-com:office:powerpoint" xmlns:com="http://schemas.openxmlformats.org/drawingml/2006/compatibility" xmlns:p15="http://schemas.microsoft.com/office/powerpoint/2012/main" xmlns:ahyp="http://schemas.microsoft.com/office/drawing/2018/hyperlinkcolor">
+    <mc:Fallback xmlns:ahyp="http://schemas.microsoft.com/office/drawing/2018/hyperlinkcolor" xmlns:p15="http://schemas.microsoft.com/office/powerpoint/2012/main" xmlns:com="http://schemas.openxmlformats.org/drawingml/2006/compatibility" xmlns:pvml="urn:schemas-microsoft-com:office:powerpoint" xmlns:v="urn:schemas-microsoft-com:vml" xmlns:o="urn:schemas-microsoft-com:office:office" xmlns:dgm="http://schemas.openxmlformats.org/drawingml/2006/diagram" xmlns:c="http://schemas.openxmlformats.org/drawingml/2006/chart" xmlns:mv="urn:schemas-microsoft-com:mac:vml" xmlns="">
       <p:transition spd="slow">
         <p:fade/>
       </p:transition>
@@ -14320,23 +14318,7 @@
             </a:pPr>
             <a:r>
               <a:rPr lang="en-US" dirty="0"/>
-              <a:t>Why </a:t>
-            </a:r>
-            <a:r>
-              <a:rPr lang="en-US" i="1" dirty="0"/>
-              <a:t>compose</a:t>
-            </a:r>
-            <a:r>
-              <a:rPr lang="en-US" dirty="0"/>
-              <a:t> instead of `</a:t>
-            </a:r>
-            <a:r>
-              <a:rPr lang="en-US" dirty="0" err="1"/>
-              <a:t>podman</a:t>
-            </a:r>
-            <a:r>
-              <a:rPr lang="en-US" dirty="0"/>
-              <a:t> run`</a:t>
+              <a:t>Process overview</a:t>
             </a:r>
           </a:p>
           <a:p>
@@ -14363,7 +14345,15 @@
             </a:pPr>
             <a:r>
               <a:rPr lang="en" dirty="0"/>
-              <a:t>Patterns and anti-patterns in containerized applications</a:t>
+              <a:t>Dos and </a:t>
+            </a:r>
+            <a:r>
+              <a:rPr lang="en" dirty="0" err="1"/>
+              <a:t>Don’t’s</a:t>
+            </a:r>
+            <a:r>
+              <a:rPr lang="en" dirty="0"/>
+              <a:t> in containerized applications</a:t>
             </a:r>
           </a:p>
           <a:p>
@@ -14561,7 +14551,7 @@
         <p:fade/>
       </p:transition>
     </mc:Choice>
-    <mc:Fallback xmlns="" xmlns:mv="urn:schemas-microsoft-com:mac:vml" xmlns:c="http://schemas.openxmlformats.org/drawingml/2006/chart" xmlns:dgm="http://schemas.openxmlformats.org/drawingml/2006/diagram" xmlns:o="urn:schemas-microsoft-com:office:office" xmlns:v="urn:schemas-microsoft-com:vml" xmlns:pvml="urn:schemas-microsoft-com:office:powerpoint" xmlns:com="http://schemas.openxmlformats.org/drawingml/2006/compatibility" xmlns:p15="http://schemas.microsoft.com/office/powerpoint/2012/main" xmlns:ahyp="http://schemas.microsoft.com/office/drawing/2018/hyperlinkcolor">
+    <mc:Fallback xmlns:ahyp="http://schemas.microsoft.com/office/drawing/2018/hyperlinkcolor" xmlns:p15="http://schemas.microsoft.com/office/powerpoint/2012/main" xmlns:com="http://schemas.openxmlformats.org/drawingml/2006/compatibility" xmlns:pvml="urn:schemas-microsoft-com:office:powerpoint" xmlns:v="urn:schemas-microsoft-com:vml" xmlns:o="urn:schemas-microsoft-com:office:office" xmlns:dgm="http://schemas.openxmlformats.org/drawingml/2006/diagram" xmlns:c="http://schemas.openxmlformats.org/drawingml/2006/chart" xmlns:mv="urn:schemas-microsoft-com:mac:vml" xmlns="">
       <p:transition spd="slow">
         <p:fade/>
       </p:transition>
@@ -14881,7 +14871,7 @@
         <p:fade/>
       </p:transition>
     </mc:Choice>
-    <mc:Fallback xmlns="" xmlns:mv="urn:schemas-microsoft-com:mac:vml" xmlns:c="http://schemas.openxmlformats.org/drawingml/2006/chart" xmlns:dgm="http://schemas.openxmlformats.org/drawingml/2006/diagram" xmlns:o="urn:schemas-microsoft-com:office:office" xmlns:v="urn:schemas-microsoft-com:vml" xmlns:pvml="urn:schemas-microsoft-com:office:powerpoint" xmlns:com="http://schemas.openxmlformats.org/drawingml/2006/compatibility" xmlns:p15="http://schemas.microsoft.com/office/powerpoint/2012/main" xmlns:ahyp="http://schemas.microsoft.com/office/drawing/2018/hyperlinkcolor">
+    <mc:Fallback xmlns:ahyp="http://schemas.microsoft.com/office/drawing/2018/hyperlinkcolor" xmlns:p15="http://schemas.microsoft.com/office/powerpoint/2012/main" xmlns:com="http://schemas.openxmlformats.org/drawingml/2006/compatibility" xmlns:pvml="urn:schemas-microsoft-com:office:powerpoint" xmlns:v="urn:schemas-microsoft-com:vml" xmlns:o="urn:schemas-microsoft-com:office:office" xmlns:dgm="http://schemas.openxmlformats.org/drawingml/2006/diagram" xmlns:c="http://schemas.openxmlformats.org/drawingml/2006/chart" xmlns:mv="urn:schemas-microsoft-com:mac:vml" xmlns="">
       <p:transition spd="slow">
         <p:fade/>
       </p:transition>
@@ -15022,7 +15012,7 @@
         <p:fade/>
       </p:transition>
     </mc:Choice>
-    <mc:Fallback xmlns="" xmlns:mv="urn:schemas-microsoft-com:mac:vml" xmlns:c="http://schemas.openxmlformats.org/drawingml/2006/chart" xmlns:dgm="http://schemas.openxmlformats.org/drawingml/2006/diagram" xmlns:o="urn:schemas-microsoft-com:office:office" xmlns:v="urn:schemas-microsoft-com:vml" xmlns:pvml="urn:schemas-microsoft-com:office:powerpoint" xmlns:com="http://schemas.openxmlformats.org/drawingml/2006/compatibility" xmlns:p15="http://schemas.microsoft.com/office/powerpoint/2012/main" xmlns:ahyp="http://schemas.microsoft.com/office/drawing/2018/hyperlinkcolor">
+    <mc:Fallback xmlns:ahyp="http://schemas.microsoft.com/office/drawing/2018/hyperlinkcolor" xmlns:p15="http://schemas.microsoft.com/office/powerpoint/2012/main" xmlns:com="http://schemas.openxmlformats.org/drawingml/2006/compatibility" xmlns:pvml="urn:schemas-microsoft-com:office:powerpoint" xmlns:v="urn:schemas-microsoft-com:vml" xmlns:o="urn:schemas-microsoft-com:office:office" xmlns:dgm="http://schemas.openxmlformats.org/drawingml/2006/diagram" xmlns:c="http://schemas.openxmlformats.org/drawingml/2006/chart" xmlns:mv="urn:schemas-microsoft-com:mac:vml" xmlns="">
       <p:transition spd="slow">
         <p:fade/>
       </p:transition>
@@ -15310,7 +15300,7 @@
         <p:fade/>
       </p:transition>
     </mc:Choice>
-    <mc:Fallback xmlns="" xmlns:mv="urn:schemas-microsoft-com:mac:vml" xmlns:c="http://schemas.openxmlformats.org/drawingml/2006/chart" xmlns:dgm="http://schemas.openxmlformats.org/drawingml/2006/diagram" xmlns:o="urn:schemas-microsoft-com:office:office" xmlns:v="urn:schemas-microsoft-com:vml" xmlns:pvml="urn:schemas-microsoft-com:office:powerpoint" xmlns:com="http://schemas.openxmlformats.org/drawingml/2006/compatibility" xmlns:p15="http://schemas.microsoft.com/office/powerpoint/2012/main" xmlns:ahyp="http://schemas.microsoft.com/office/drawing/2018/hyperlinkcolor">
+    <mc:Fallback xmlns:ahyp="http://schemas.microsoft.com/office/drawing/2018/hyperlinkcolor" xmlns:p15="http://schemas.microsoft.com/office/powerpoint/2012/main" xmlns:com="http://schemas.openxmlformats.org/drawingml/2006/compatibility" xmlns:pvml="urn:schemas-microsoft-com:office:powerpoint" xmlns:v="urn:schemas-microsoft-com:vml" xmlns:o="urn:schemas-microsoft-com:office:office" xmlns:dgm="http://schemas.openxmlformats.org/drawingml/2006/diagram" xmlns:c="http://schemas.openxmlformats.org/drawingml/2006/chart" xmlns:mv="urn:schemas-microsoft-com:mac:vml" xmlns="">
       <p:transition spd="slow">
         <p:fade/>
       </p:transition>
@@ -15610,7 +15600,7 @@
         <p:fade/>
       </p:transition>
     </mc:Choice>
-    <mc:Fallback xmlns="" xmlns:mv="urn:schemas-microsoft-com:mac:vml" xmlns:c="http://schemas.openxmlformats.org/drawingml/2006/chart" xmlns:dgm="http://schemas.openxmlformats.org/drawingml/2006/diagram" xmlns:o="urn:schemas-microsoft-com:office:office" xmlns:v="urn:schemas-microsoft-com:vml" xmlns:pvml="urn:schemas-microsoft-com:office:powerpoint" xmlns:com="http://schemas.openxmlformats.org/drawingml/2006/compatibility" xmlns:p15="http://schemas.microsoft.com/office/powerpoint/2012/main" xmlns:ahyp="http://schemas.microsoft.com/office/drawing/2018/hyperlinkcolor">
+    <mc:Fallback xmlns:ahyp="http://schemas.microsoft.com/office/drawing/2018/hyperlinkcolor" xmlns:p15="http://schemas.microsoft.com/office/powerpoint/2012/main" xmlns:com="http://schemas.openxmlformats.org/drawingml/2006/compatibility" xmlns:pvml="urn:schemas-microsoft-com:office:powerpoint" xmlns:v="urn:schemas-microsoft-com:vml" xmlns:o="urn:schemas-microsoft-com:office:office" xmlns:dgm="http://schemas.openxmlformats.org/drawingml/2006/diagram" xmlns:c="http://schemas.openxmlformats.org/drawingml/2006/chart" xmlns:mv="urn:schemas-microsoft-com:mac:vml" xmlns="">
       <p:transition spd="slow">
         <p:fade/>
       </p:transition>
@@ -16018,7 +16008,7 @@
         <p:fade/>
       </p:transition>
     </mc:Choice>
-    <mc:Fallback xmlns="" xmlns:mv="urn:schemas-microsoft-com:mac:vml" xmlns:c="http://schemas.openxmlformats.org/drawingml/2006/chart" xmlns:dgm="http://schemas.openxmlformats.org/drawingml/2006/diagram" xmlns:o="urn:schemas-microsoft-com:office:office" xmlns:v="urn:schemas-microsoft-com:vml" xmlns:pvml="urn:schemas-microsoft-com:office:powerpoint" xmlns:com="http://schemas.openxmlformats.org/drawingml/2006/compatibility" xmlns:p15="http://schemas.microsoft.com/office/powerpoint/2012/main" xmlns:ahyp="http://schemas.microsoft.com/office/drawing/2018/hyperlinkcolor">
+    <mc:Fallback xmlns:ahyp="http://schemas.microsoft.com/office/drawing/2018/hyperlinkcolor" xmlns:p15="http://schemas.microsoft.com/office/powerpoint/2012/main" xmlns:com="http://schemas.openxmlformats.org/drawingml/2006/compatibility" xmlns:pvml="urn:schemas-microsoft-com:office:powerpoint" xmlns:v="urn:schemas-microsoft-com:vml" xmlns:o="urn:schemas-microsoft-com:office:office" xmlns:dgm="http://schemas.openxmlformats.org/drawingml/2006/diagram" xmlns:c="http://schemas.openxmlformats.org/drawingml/2006/chart" xmlns:mv="urn:schemas-microsoft-com:mac:vml" xmlns="">
       <p:transition spd="slow">
         <p:fade/>
       </p:transition>
@@ -16395,7 +16385,7 @@
         <p:fade/>
       </p:transition>
     </mc:Choice>
-    <mc:Fallback xmlns="" xmlns:mv="urn:schemas-microsoft-com:mac:vml" xmlns:c="http://schemas.openxmlformats.org/drawingml/2006/chart" xmlns:dgm="http://schemas.openxmlformats.org/drawingml/2006/diagram" xmlns:o="urn:schemas-microsoft-com:office:office" xmlns:v="urn:schemas-microsoft-com:vml" xmlns:pvml="urn:schemas-microsoft-com:office:powerpoint" xmlns:com="http://schemas.openxmlformats.org/drawingml/2006/compatibility" xmlns:p15="http://schemas.microsoft.com/office/powerpoint/2012/main" xmlns:ahyp="http://schemas.microsoft.com/office/drawing/2018/hyperlinkcolor">
+    <mc:Fallback xmlns:ahyp="http://schemas.microsoft.com/office/drawing/2018/hyperlinkcolor" xmlns:p15="http://schemas.microsoft.com/office/powerpoint/2012/main" xmlns:com="http://schemas.openxmlformats.org/drawingml/2006/compatibility" xmlns:pvml="urn:schemas-microsoft-com:office:powerpoint" xmlns:v="urn:schemas-microsoft-com:vml" xmlns:o="urn:schemas-microsoft-com:office:office" xmlns:dgm="http://schemas.openxmlformats.org/drawingml/2006/diagram" xmlns:c="http://schemas.openxmlformats.org/drawingml/2006/chart" xmlns:mv="urn:schemas-microsoft-com:mac:vml" xmlns="">
       <p:transition spd="slow">
         <p:fade/>
       </p:transition>
@@ -16759,7 +16749,7 @@
         <p:fade/>
       </p:transition>
     </mc:Choice>
-    <mc:Fallback xmlns="" xmlns:mv="urn:schemas-microsoft-com:mac:vml" xmlns:c="http://schemas.openxmlformats.org/drawingml/2006/chart" xmlns:dgm="http://schemas.openxmlformats.org/drawingml/2006/diagram" xmlns:o="urn:schemas-microsoft-com:office:office" xmlns:v="urn:schemas-microsoft-com:vml" xmlns:pvml="urn:schemas-microsoft-com:office:powerpoint" xmlns:com="http://schemas.openxmlformats.org/drawingml/2006/compatibility" xmlns:p15="http://schemas.microsoft.com/office/powerpoint/2012/main" xmlns:ahyp="http://schemas.microsoft.com/office/drawing/2018/hyperlinkcolor">
+    <mc:Fallback xmlns:ahyp="http://schemas.microsoft.com/office/drawing/2018/hyperlinkcolor" xmlns:p15="http://schemas.microsoft.com/office/powerpoint/2012/main" xmlns:com="http://schemas.openxmlformats.org/drawingml/2006/compatibility" xmlns:pvml="urn:schemas-microsoft-com:office:powerpoint" xmlns:v="urn:schemas-microsoft-com:vml" xmlns:o="urn:schemas-microsoft-com:office:office" xmlns:dgm="http://schemas.openxmlformats.org/drawingml/2006/diagram" xmlns:c="http://schemas.openxmlformats.org/drawingml/2006/chart" xmlns:mv="urn:schemas-microsoft-com:mac:vml" xmlns="">
       <p:transition spd="slow">
         <p:fade/>
       </p:transition>
